--- a/content/docs/theory-analysis/envoy-xds-configuration/images/images.pptx
+++ b/content/docs/theory-analysis/envoy-xds-configuration/images/images.pptx
@@ -6386,7 +6386,7 @@
                   <a:schemeClr val="tx1"/>
                 </a:solidFill>
               </a:rPr>
-              <a:t>SNI: db.example</a:t>
+              <a:t>SNI: kafka.com</a:t>
             </a:r>
           </a:p>
           <a:p>
@@ -6396,7 +6396,7 @@
                   <a:schemeClr val="tx1"/>
                 </a:solidFill>
               </a:rPr>
-              <a:t>SDS: example</a:t>
+              <a:t>SDS: kafka-cert</a:t>
             </a:r>
             <a:endParaRPr kumimoji="1" lang="ko-KR" altLang="en-US" sz="800">
               <a:solidFill>
@@ -6899,7 +6899,7 @@
                   <a:schemeClr val="tx1"/>
                 </a:solidFill>
               </a:rPr>
-              <a:t>kakfa-cert</a:t>
+              <a:t>kafka-cert</a:t>
             </a:r>
             <a:endParaRPr kumimoji="1" lang="ko-KR" altLang="en-US" sz="800">
               <a:solidFill>

--- a/content/docs/theory-analysis/envoy-xds-configuration/images/images.pptx
+++ b/content/docs/theory-analysis/envoy-xds-configuration/images/images.pptx
@@ -215,7 +215,7 @@
           <a:p>
             <a:fld id="{6CD5550B-26C4-49A9-A5BA-636EF7BE6CE9}" type="datetimeFigureOut">
               <a:rPr lang="ko-KR" altLang="en-US" smtClean="0"/>
-              <a:t>2026. 7. 19.</a:t>
+              <a:t>2026. 7. 20.</a:t>
             </a:fld>
             <a:endParaRPr lang="ko-KR" altLang="en-US"/>
           </a:p>
@@ -661,7 +661,7 @@
           <a:p>
             <a:fld id="{FB30EDBD-1C2D-4C1E-B459-B60219FAB484}" type="datetimeFigureOut">
               <a:rPr lang="ko-KR" altLang="en-US" smtClean="0"/>
-              <a:t>2026. 7. 19.</a:t>
+              <a:t>2026. 7. 20.</a:t>
             </a:fld>
             <a:endParaRPr lang="ko-KR" altLang="en-US"/>
           </a:p>
@@ -824,7 +824,7 @@
           <a:p>
             <a:fld id="{FB30EDBD-1C2D-4C1E-B459-B60219FAB484}" type="datetimeFigureOut">
               <a:rPr lang="ko-KR" altLang="en-US" smtClean="0"/>
-              <a:t>2026. 7. 19.</a:t>
+              <a:t>2026. 7. 20.</a:t>
             </a:fld>
             <a:endParaRPr lang="ko-KR" altLang="en-US"/>
           </a:p>
@@ -997,7 +997,7 @@
           <a:p>
             <a:fld id="{FB30EDBD-1C2D-4C1E-B459-B60219FAB484}" type="datetimeFigureOut">
               <a:rPr lang="ko-KR" altLang="en-US" smtClean="0"/>
-              <a:t>2026. 7. 19.</a:t>
+              <a:t>2026. 7. 20.</a:t>
             </a:fld>
             <a:endParaRPr lang="ko-KR" altLang="en-US"/>
           </a:p>
@@ -1160,7 +1160,7 @@
           <a:p>
             <a:fld id="{FB30EDBD-1C2D-4C1E-B459-B60219FAB484}" type="datetimeFigureOut">
               <a:rPr lang="ko-KR" altLang="en-US" smtClean="0"/>
-              <a:t>2026. 7. 19.</a:t>
+              <a:t>2026. 7. 20.</a:t>
             </a:fld>
             <a:endParaRPr lang="ko-KR" altLang="en-US"/>
           </a:p>
@@ -1400,7 +1400,7 @@
           <a:p>
             <a:fld id="{FB30EDBD-1C2D-4C1E-B459-B60219FAB484}" type="datetimeFigureOut">
               <a:rPr lang="ko-KR" altLang="en-US" smtClean="0"/>
-              <a:t>2026. 7. 19.</a:t>
+              <a:t>2026. 7. 20.</a:t>
             </a:fld>
             <a:endParaRPr lang="ko-KR" altLang="en-US"/>
           </a:p>
@@ -1680,7 +1680,7 @@
           <a:p>
             <a:fld id="{FB30EDBD-1C2D-4C1E-B459-B60219FAB484}" type="datetimeFigureOut">
               <a:rPr lang="ko-KR" altLang="en-US" smtClean="0"/>
-              <a:t>2026. 7. 19.</a:t>
+              <a:t>2026. 7. 20.</a:t>
             </a:fld>
             <a:endParaRPr lang="ko-KR" altLang="en-US"/>
           </a:p>
@@ -2094,7 +2094,7 @@
           <a:p>
             <a:fld id="{FB30EDBD-1C2D-4C1E-B459-B60219FAB484}" type="datetimeFigureOut">
               <a:rPr lang="ko-KR" altLang="en-US" smtClean="0"/>
-              <a:t>2026. 7. 19.</a:t>
+              <a:t>2026. 7. 20.</a:t>
             </a:fld>
             <a:endParaRPr lang="ko-KR" altLang="en-US"/>
           </a:p>
@@ -2206,7 +2206,7 @@
           <a:p>
             <a:fld id="{FB30EDBD-1C2D-4C1E-B459-B60219FAB484}" type="datetimeFigureOut">
               <a:rPr lang="ko-KR" altLang="en-US" smtClean="0"/>
-              <a:t>2026. 7. 19.</a:t>
+              <a:t>2026. 7. 20.</a:t>
             </a:fld>
             <a:endParaRPr lang="ko-KR" altLang="en-US"/>
           </a:p>
@@ -2296,7 +2296,7 @@
           <a:p>
             <a:fld id="{FB30EDBD-1C2D-4C1E-B459-B60219FAB484}" type="datetimeFigureOut">
               <a:rPr lang="ko-KR" altLang="en-US" smtClean="0"/>
-              <a:t>2026. 7. 19.</a:t>
+              <a:t>2026. 7. 20.</a:t>
             </a:fld>
             <a:endParaRPr lang="ko-KR" altLang="en-US"/>
           </a:p>
@@ -2566,7 +2566,7 @@
           <a:p>
             <a:fld id="{FB30EDBD-1C2D-4C1E-B459-B60219FAB484}" type="datetimeFigureOut">
               <a:rPr lang="ko-KR" altLang="en-US" smtClean="0"/>
-              <a:t>2026. 7. 19.</a:t>
+              <a:t>2026. 7. 20.</a:t>
             </a:fld>
             <a:endParaRPr lang="ko-KR" altLang="en-US"/>
           </a:p>
@@ -2813,7 +2813,7 @@
           <a:p>
             <a:fld id="{FB30EDBD-1C2D-4C1E-B459-B60219FAB484}" type="datetimeFigureOut">
               <a:rPr lang="ko-KR" altLang="en-US" smtClean="0"/>
-              <a:t>2026. 7. 19.</a:t>
+              <a:t>2026. 7. 20.</a:t>
             </a:fld>
             <a:endParaRPr lang="ko-KR" altLang="en-US"/>
           </a:p>
@@ -3019,7 +3019,7 @@
           <a:p>
             <a:fld id="{FB30EDBD-1C2D-4C1E-B459-B60219FAB484}" type="datetimeFigureOut">
               <a:rPr lang="ko-KR" altLang="en-US" smtClean="0"/>
-              <a:t>2026. 7. 19.</a:t>
+              <a:t>2026. 7. 20.</a:t>
             </a:fld>
             <a:endParaRPr lang="ko-KR" altLang="en-US"/>
           </a:p>
@@ -5727,7 +5727,7 @@
                   <a:schemeClr val="tx1"/>
                 </a:solidFill>
               </a:rPr>
-              <a:t>Host: example.com </a:t>
+              <a:t>Host: web.com </a:t>
             </a:r>
             <a:r>
               <a:rPr kumimoji="1" lang="en-US" altLang="ko-KR" sz="800">
